--- a/dist/초1/기술·가정/만들기/초1_기술·가정_만들기_01_안전한재료로만들기.pptx
+++ b/dist/초1/기술·가정/만들기/초1_기술·가정_만들기_01_안전한재료로만들기.pptx
@@ -114,34 +114,34 @@
   <p:extLst>
     <p:ext uri="{521415D9-36F7-43E2-AB2F-B90AF26B5E84}">
       <p14:sectionLst xmlns:p14="http://schemas.microsoft.com/office/powerpoint/2010/main">
-        <p14:section name="도입" id="{45a2f920-da19-9db7-e5d1-ca95793eae23}">
+        <p14:section name="도입" id="{65650014-59e4-5782-a5b2-af80aec240a1}">
           <p14:sldIdLst>
             <p14:sldId id="256"/>
             <p14:sldId id="257"/>
           </p14:sldIdLst>
         </p14:section>
-        <p14:section name="개념" id="{153aaa37-bb00-63a1-5bae-eb1979c5c73a}">
+        <p14:section name="개념" id="{79b0f80c-855a-d11a-e3ac-d08615a68474}">
           <p14:sldIdLst>
             <p14:sldId id="258"/>
           </p14:sldIdLst>
         </p14:section>
-        <p14:section name="연습" id="{cec3ba6e-3db8-3721-c0dc-ae19766f3ac5}">
+        <p14:section name="연습" id="{f2f53ec5-6f66-8355-6598-89c9626d7a22}">
           <p14:sldIdLst>
             <p14:sldId id="259"/>
             <p14:sldId id="260"/>
           </p14:sldIdLst>
         </p14:section>
-        <p14:section name="확인" id="{e2c17895-eef0-3983-6b8c-95b70548d2cf}">
+        <p14:section name="확인" id="{4964d989-fec1-7f98-77f4-0e676b4fe157}">
           <p14:sldIdLst>
             <p14:sldId id="261"/>
           </p14:sldIdLst>
         </p14:section>
-        <p14:section name="정리" id="{c4672ea4-ef22-d5e4-af2e-20c67c54082a}">
+        <p14:section name="정리" id="{2d806ef5-4a25-7592-f775-01417f0e5758}">
           <p14:sldIdLst>
             <p14:sldId id="262"/>
           </p14:sldIdLst>
         </p14:section>
-        <p14:section name="보충" id="{ef32e524-5f77-ccbd-7bf2-00b5cdf3b53b}">
+        <p14:section name="보충" id="{8ab8b7ee-eb80-dab5-06b8-c817577e402a}">
           <p14:sldIdLst>
             <p14:sldId id="263"/>
           </p14:sldIdLst>
